--- a/06_ppt/SiO2_MLIP_SevenNet_pilot_v10.pptx
+++ b/06_ppt/SiO2_MLIP_SevenNet_pilot_v10.pptx
@@ -203,7 +203,7 @@
           <a:p>
             <a:fld id="{92C91F33-CBB4-A247-B7D0-A64F2A07719C}" type="datetimeFigureOut">
               <a:rPr kumimoji="1" lang="ko-KR" altLang="en-US" smtClean="0"/>
-              <a:t>2026. 8. 18.</a:t>
+              <a:t>2026. 8. 27.</a:t>
             </a:fld>
             <a:endParaRPr kumimoji="1" lang="ko-KR" altLang="en-US"/>
           </a:p>
@@ -2067,7 +2067,7 @@
           <a:p>
             <a:fld id="{96ECACCA-3741-0D40-A94E-41DBB1D0486F}" type="datetimeFigureOut">
               <a:rPr kumimoji="1" lang="ko-KR" altLang="en-US" smtClean="0"/>
-              <a:t>2026. 8. 18.</a:t>
+              <a:t>2026. 8. 27.</a:t>
             </a:fld>
             <a:endParaRPr kumimoji="1" lang="ko-KR" altLang="en-US"/>
           </a:p>
@@ -2369,7 +2369,7 @@
           <a:p>
             <a:fld id="{96ECACCA-3741-0D40-A94E-41DBB1D0486F}" type="datetimeFigureOut">
               <a:rPr kumimoji="1" lang="ko-KR" altLang="en-US" smtClean="0"/>
-              <a:t>2026. 8. 18.</a:t>
+              <a:t>2026. 8. 27.</a:t>
             </a:fld>
             <a:endParaRPr kumimoji="1" lang="ko-KR" altLang="en-US"/>
           </a:p>
@@ -2506,7 +2506,7 @@
           <a:p>
             <a:fld id="{96ECACCA-3741-0D40-A94E-41DBB1D0486F}" type="datetimeFigureOut">
               <a:rPr kumimoji="1" lang="ko-KR" altLang="en-US" smtClean="0"/>
-              <a:t>2026. 8. 18.</a:t>
+              <a:t>2026. 8. 27.</a:t>
             </a:fld>
             <a:endParaRPr kumimoji="1" lang="ko-KR" altLang="en-US"/>
           </a:p>
@@ -2653,7 +2653,7 @@
           <a:p>
             <a:fld id="{96ECACCA-3741-0D40-A94E-41DBB1D0486F}" type="datetimeFigureOut">
               <a:rPr kumimoji="1" lang="ko-KR" altLang="en-US" smtClean="0"/>
-              <a:t>2026. 8. 18.</a:t>
+              <a:t>2026. 8. 27.</a:t>
             </a:fld>
             <a:endParaRPr kumimoji="1" lang="ko-KR" altLang="en-US"/>
           </a:p>
@@ -3051,7 +3051,7 @@
           <a:p>
             <a:fld id="{311ED3F7-D977-4046-97E6-A3D7881A4583}" type="datetime1">
               <a:rPr kumimoji="1" lang="ko-KR" altLang="en-US" smtClean="0"/>
-              <a:t>2026. 8. 18.</a:t>
+              <a:t>2026. 8. 27.</a:t>
             </a:fld>
             <a:endParaRPr kumimoji="1" lang="ko-KR" altLang="en-US" dirty="0"/>
           </a:p>
@@ -3381,7 +3381,7 @@
         <p:fade/>
       </p:transition>
     </mc:Choice>
-    <mc:Fallback xmlns="" xmlns:mv="urn:schemas-microsoft-com:mac:vml" xmlns:c="http://schemas.openxmlformats.org/drawingml/2006/chart" xmlns:dgm="http://schemas.openxmlformats.org/drawingml/2006/diagram" xmlns:o="urn:schemas-microsoft-com:office:office" xmlns:v="urn:schemas-microsoft-com:vml" xmlns:pvml="urn:schemas-microsoft-com:office:powerpoint" xmlns:com="http://schemas.openxmlformats.org/drawingml/2006/compatibility" xmlns:p15="http://schemas.microsoft.com/office/powerpoint/2012/main">
+    <mc:Fallback xmlns:p15="http://schemas.microsoft.com/office/powerpoint/2012/main" xmlns:com="http://schemas.openxmlformats.org/drawingml/2006/compatibility" xmlns:pvml="urn:schemas-microsoft-com:office:powerpoint" xmlns:v="urn:schemas-microsoft-com:vml" xmlns:o="urn:schemas-microsoft-com:office:office" xmlns:dgm="http://schemas.openxmlformats.org/drawingml/2006/diagram" xmlns:c="http://schemas.openxmlformats.org/drawingml/2006/chart" xmlns:mv="urn:schemas-microsoft-com:mac:vml" xmlns="">
       <p:transition spd="slow">
         <p:fade/>
       </p:transition>
@@ -3473,7 +3473,7 @@
           <a:p>
             <a:fld id="{96ECACCA-3741-0D40-A94E-41DBB1D0486F}" type="datetimeFigureOut">
               <a:rPr kumimoji="1" lang="ko-KR" altLang="en-US" smtClean="0"/>
-              <a:t>2026. 8. 18.</a:t>
+              <a:t>2026. 8. 27.</a:t>
             </a:fld>
             <a:endParaRPr kumimoji="1" lang="ko-KR" altLang="en-US"/>
           </a:p>
@@ -3638,7 +3638,7 @@
           <a:p>
             <a:fld id="{96ECACCA-3741-0D40-A94E-41DBB1D0486F}" type="datetimeFigureOut">
               <a:rPr kumimoji="1" lang="ko-KR" altLang="en-US" smtClean="0"/>
-              <a:t>2026. 8. 18.</a:t>
+              <a:t>2026. 8. 27.</a:t>
             </a:fld>
             <a:endParaRPr kumimoji="1" lang="ko-KR" altLang="en-US"/>
           </a:p>
@@ -3917,7 +3917,7 @@
           <a:p>
             <a:fld id="{96ECACCA-3741-0D40-A94E-41DBB1D0486F}" type="datetimeFigureOut">
               <a:rPr kumimoji="1" lang="ko-KR" altLang="en-US" smtClean="0"/>
-              <a:t>2026. 8. 18.</a:t>
+              <a:t>2026. 8. 27.</a:t>
             </a:fld>
             <a:endParaRPr kumimoji="1" lang="ko-KR" altLang="en-US"/>
           </a:p>
@@ -4122,7 +4122,7 @@
           <a:p>
             <a:fld id="{96ECACCA-3741-0D40-A94E-41DBB1D0486F}" type="datetimeFigureOut">
               <a:rPr kumimoji="1" lang="ko-KR" altLang="en-US" smtClean="0"/>
-              <a:t>2026. 8. 18.</a:t>
+              <a:t>2026. 8. 27.</a:t>
             </a:fld>
             <a:endParaRPr kumimoji="1" lang="ko-KR" altLang="en-US"/>
           </a:p>
@@ -4400,7 +4400,7 @@
           <a:p>
             <a:fld id="{96ECACCA-3741-0D40-A94E-41DBB1D0486F}" type="datetimeFigureOut">
               <a:rPr kumimoji="1" lang="ko-KR" altLang="en-US" smtClean="0"/>
-              <a:t>2026. 8. 18.</a:t>
+              <a:t>2026. 8. 27.</a:t>
             </a:fld>
             <a:endParaRPr kumimoji="1" lang="ko-KR" altLang="en-US"/>
           </a:p>
@@ -4546,7 +4546,7 @@
           <a:p>
             <a:fld id="{96ECACCA-3741-0D40-A94E-41DBB1D0486F}" type="datetimeFigureOut">
               <a:rPr kumimoji="1" lang="ko-KR" altLang="en-US" smtClean="0"/>
-              <a:t>2026. 8. 18.</a:t>
+              <a:t>2026. 8. 27.</a:t>
             </a:fld>
             <a:endParaRPr kumimoji="1" lang="ko-KR" altLang="en-US"/>
           </a:p>
@@ -4638,7 +4638,7 @@
           <a:p>
             <a:fld id="{96ECACCA-3741-0D40-A94E-41DBB1D0486F}" type="datetimeFigureOut">
               <a:rPr kumimoji="1" lang="ko-KR" altLang="en-US" smtClean="0"/>
-              <a:t>2026. 8. 18.</a:t>
+              <a:t>2026. 8. 27.</a:t>
             </a:fld>
             <a:endParaRPr kumimoji="1" lang="ko-KR" altLang="en-US"/>
           </a:p>
@@ -4882,7 +4882,7 @@
           <a:p>
             <a:fld id="{96ECACCA-3741-0D40-A94E-41DBB1D0486F}" type="datetimeFigureOut">
               <a:rPr kumimoji="1" lang="ko-KR" altLang="en-US" smtClean="0"/>
-              <a:t>2026. 8. 18.</a:t>
+              <a:t>2026. 8. 27.</a:t>
             </a:fld>
             <a:endParaRPr kumimoji="1" lang="ko-KR" altLang="en-US"/>
           </a:p>
@@ -5212,7 +5212,7 @@
           <a:p>
             <a:fld id="{96ECACCA-3741-0D40-A94E-41DBB1D0486F}" type="datetimeFigureOut">
               <a:rPr kumimoji="1" lang="ko-KR" altLang="en-US" smtClean="0"/>
-              <a:t>2026. 8. 18.</a:t>
+              <a:t>2026. 8. 27.</a:t>
             </a:fld>
             <a:endParaRPr kumimoji="1" lang="ko-KR" altLang="en-US"/>
           </a:p>
@@ -5939,7 +5939,7 @@
                 <a:spcPts val="400"/>
               </a:spcBef>
               <a:spcAft>
-                <a:spcPts val="800"/>
+                <a:spcPts val="400"/>
               </a:spcAft>
               <a:buNone/>
             </a:pPr>
@@ -5990,7 +5990,30 @@
                 <a:spcPts val="400"/>
               </a:spcBef>
               <a:spcAft>
-                <a:spcPts val="800"/>
+                <a:spcPts val="400"/>
+              </a:spcAft>
+              <a:buNone/>
+            </a:pPr>
+            <a:r>
+              <a:rPr lang="en-US" sz="2600" dirty="0">
+                <a:ea typeface="맑은 고딕"/>
+              </a:rPr>
+              <a:t>Part 1</a:t>
+            </a:r>
+            <a:endParaRPr lang="en-US" sz="2600" b="0" i="0" dirty="0">
+              <a:ea typeface="맑은 고딕"/>
+            </a:endParaRPr>
+          </a:p>
+          <a:p>
+            <a:pPr marL="0" indent="0" eaLnBrk="0" latinLnBrk="0" hangingPunct="0">
+              <a:lnSpc>
+                <a:spcPct val="130000"/>
+              </a:lnSpc>
+              <a:spcBef>
+                <a:spcPts val="400"/>
+              </a:spcBef>
+              <a:spcAft>
+                <a:spcPts val="400"/>
               </a:spcAft>
               <a:buNone/>
             </a:pPr>
@@ -6049,7 +6072,7 @@
                 <a:spcPts val="400"/>
               </a:spcBef>
               <a:spcAft>
-                <a:spcPts val="800"/>
+                <a:spcPts val="400"/>
               </a:spcAft>
               <a:buNone/>
             </a:pPr>
